--- a/ゲーム科1年/00_前期/ゲームエンジンⅠ/02_オブジェクトとコンポーネント.pptx
+++ b/ゲーム科1年/00_前期/ゲームエンジンⅠ/02_オブジェクトとコンポーネント.pptx
@@ -275,7 +275,7 @@
           <a:p>
             <a:fld id="{E9CC885B-4903-4D54-9A93-00025F12DED9}" type="datetimeFigureOut">
               <a:rPr kumimoji="1" lang="ja-JP" altLang="en-US" smtClean="0"/>
-              <a:t>2024/9/18</a:t>
+              <a:t>2025/3/3</a:t>
             </a:fld>
             <a:endParaRPr kumimoji="1" lang="ja-JP" altLang="en-US"/>
           </a:p>
@@ -505,7 +505,7 @@
           <a:p>
             <a:fld id="{E9CC885B-4903-4D54-9A93-00025F12DED9}" type="datetimeFigureOut">
               <a:rPr kumimoji="1" lang="ja-JP" altLang="en-US" smtClean="0"/>
-              <a:t>2024/9/18</a:t>
+              <a:t>2025/3/3</a:t>
             </a:fld>
             <a:endParaRPr kumimoji="1" lang="ja-JP" altLang="en-US"/>
           </a:p>
@@ -745,7 +745,7 @@
           <a:p>
             <a:fld id="{E9CC885B-4903-4D54-9A93-00025F12DED9}" type="datetimeFigureOut">
               <a:rPr kumimoji="1" lang="ja-JP" altLang="en-US" smtClean="0"/>
-              <a:t>2024/9/18</a:t>
+              <a:t>2025/3/3</a:t>
             </a:fld>
             <a:endParaRPr kumimoji="1" lang="ja-JP" altLang="en-US"/>
           </a:p>
@@ -975,7 +975,7 @@
           <a:p>
             <a:fld id="{E9CC885B-4903-4D54-9A93-00025F12DED9}" type="datetimeFigureOut">
               <a:rPr kumimoji="1" lang="ja-JP" altLang="en-US" smtClean="0"/>
-              <a:t>2024/9/18</a:t>
+              <a:t>2025/3/3</a:t>
             </a:fld>
             <a:endParaRPr kumimoji="1" lang="ja-JP" altLang="en-US"/>
           </a:p>
@@ -1250,7 +1250,7 @@
           <a:p>
             <a:fld id="{E9CC885B-4903-4D54-9A93-00025F12DED9}" type="datetimeFigureOut">
               <a:rPr kumimoji="1" lang="ja-JP" altLang="en-US" smtClean="0"/>
-              <a:t>2024/9/18</a:t>
+              <a:t>2025/3/3</a:t>
             </a:fld>
             <a:endParaRPr kumimoji="1" lang="ja-JP" altLang="en-US"/>
           </a:p>
@@ -1579,7 +1579,7 @@
           <a:p>
             <a:fld id="{E9CC885B-4903-4D54-9A93-00025F12DED9}" type="datetimeFigureOut">
               <a:rPr kumimoji="1" lang="ja-JP" altLang="en-US" smtClean="0"/>
-              <a:t>2024/9/18</a:t>
+              <a:t>2025/3/3</a:t>
             </a:fld>
             <a:endParaRPr kumimoji="1" lang="ja-JP" altLang="en-US"/>
           </a:p>
@@ -2055,7 +2055,7 @@
           <a:p>
             <a:fld id="{E9CC885B-4903-4D54-9A93-00025F12DED9}" type="datetimeFigureOut">
               <a:rPr kumimoji="1" lang="ja-JP" altLang="en-US" smtClean="0"/>
-              <a:t>2024/9/18</a:t>
+              <a:t>2025/3/3</a:t>
             </a:fld>
             <a:endParaRPr kumimoji="1" lang="ja-JP" altLang="en-US"/>
           </a:p>
@@ -2196,7 +2196,7 @@
           <a:p>
             <a:fld id="{E9CC885B-4903-4D54-9A93-00025F12DED9}" type="datetimeFigureOut">
               <a:rPr kumimoji="1" lang="ja-JP" altLang="en-US" smtClean="0"/>
-              <a:t>2024/9/18</a:t>
+              <a:t>2025/3/3</a:t>
             </a:fld>
             <a:endParaRPr kumimoji="1" lang="ja-JP" altLang="en-US"/>
           </a:p>
@@ -2309,7 +2309,7 @@
           <a:p>
             <a:fld id="{E9CC885B-4903-4D54-9A93-00025F12DED9}" type="datetimeFigureOut">
               <a:rPr kumimoji="1" lang="ja-JP" altLang="en-US" smtClean="0"/>
-              <a:t>2024/9/18</a:t>
+              <a:t>2025/3/3</a:t>
             </a:fld>
             <a:endParaRPr kumimoji="1" lang="ja-JP" altLang="en-US"/>
           </a:p>
@@ -2652,7 +2652,7 @@
           <a:p>
             <a:fld id="{E9CC885B-4903-4D54-9A93-00025F12DED9}" type="datetimeFigureOut">
               <a:rPr kumimoji="1" lang="ja-JP" altLang="en-US" smtClean="0"/>
-              <a:t>2024/9/18</a:t>
+              <a:t>2025/3/3</a:t>
             </a:fld>
             <a:endParaRPr kumimoji="1" lang="ja-JP" altLang="en-US"/>
           </a:p>
@@ -2940,7 +2940,7 @@
           <a:p>
             <a:fld id="{E9CC885B-4903-4D54-9A93-00025F12DED9}" type="datetimeFigureOut">
               <a:rPr kumimoji="1" lang="ja-JP" altLang="en-US" smtClean="0"/>
-              <a:t>2024/9/18</a:t>
+              <a:t>2025/3/3</a:t>
             </a:fld>
             <a:endParaRPr kumimoji="1" lang="ja-JP" altLang="en-US"/>
           </a:p>
@@ -3213,7 +3213,7 @@
           <a:p>
             <a:fld id="{E9CC885B-4903-4D54-9A93-00025F12DED9}" type="datetimeFigureOut">
               <a:rPr kumimoji="1" lang="ja-JP" altLang="en-US" smtClean="0"/>
-              <a:t>2024/9/18</a:t>
+              <a:t>2025/3/3</a:t>
             </a:fld>
             <a:endParaRPr kumimoji="1" lang="ja-JP" altLang="en-US"/>
           </a:p>
@@ -5390,10 +5390,18 @@
           </a:p>
           <a:p>
             <a:r>
-              <a:rPr kumimoji="1" lang="ja-JP" altLang="en-US" sz="2400" dirty="0"/>
+              <a:rPr kumimoji="1" lang="ja-JP" altLang="en-US" sz="2400" b="1" dirty="0">
+                <a:solidFill>
+                  <a:srgbClr val="FF0000"/>
+                </a:solidFill>
+              </a:rPr>
               <a:t>■オブジェクトの例</a:t>
             </a:r>
-            <a:endParaRPr kumimoji="1" lang="en-US" altLang="ja-JP" sz="2400" dirty="0"/>
+            <a:endParaRPr kumimoji="1" lang="en-US" altLang="ja-JP" sz="2400" b="1" dirty="0">
+              <a:solidFill>
+                <a:srgbClr val="FF0000"/>
+              </a:solidFill>
+            </a:endParaRPr>
           </a:p>
           <a:p>
             <a:r>
